--- a/ppt/slides.pptx
+++ b/ppt/slides.pptx
@@ -3418,22 +3418,22 @@
                         <a:defRPr sz="1100"/>
                       </a:pPr>
                       <a:r>
-                        <a:t>43.17</a:t>
-                      </a:r>
-                    </a:p>
-                  </a:txBody>
-                  <a:tcPr/>
-                </a:tc>
-                <a:tc>
-                  <a:txBody>
-                    <a:bodyPr/>
-                    <a:lstStyle/>
-                    <a:p>
-                      <a:pPr>
-                        <a:defRPr sz="1100"/>
-                      </a:pPr>
-                      <a:r>
-                        <a:t>0.9824</a:t>
+                        <a:t>45.479</a:t>
+                      </a:r>
+                    </a:p>
+                  </a:txBody>
+                  <a:tcPr/>
+                </a:tc>
+                <a:tc>
+                  <a:txBody>
+                    <a:bodyPr/>
+                    <a:lstStyle/>
+                    <a:p>
+                      <a:pPr>
+                        <a:defRPr sz="1100"/>
+                      </a:pPr>
+                      <a:r>
+                        <a:t>0.9885</a:t>
                       </a:r>
                     </a:p>
                   </a:txBody>
@@ -3450,37 +3450,37 @@
                         <a:defRPr sz="1100"/>
                       </a:pPr>
                       <a:r>
-                        <a:t>Variant B (mean-pooled) — mean, 32 images</a:t>
-                      </a:r>
-                    </a:p>
-                  </a:txBody>
-                  <a:tcPr/>
-                </a:tc>
-                <a:tc>
-                  <a:txBody>
-                    <a:bodyPr/>
-                    <a:lstStyle/>
-                    <a:p>
-                      <a:pPr>
-                        <a:defRPr sz="1100"/>
-                      </a:pPr>
-                      <a:r>
-                        <a:t>44.23</a:t>
-                      </a:r>
-                    </a:p>
-                  </a:txBody>
-                  <a:tcPr/>
-                </a:tc>
-                <a:tc>
-                  <a:txBody>
-                    <a:bodyPr/>
-                    <a:lstStyle/>
-                    <a:p>
-                      <a:pPr>
-                        <a:defRPr sz="1100"/>
-                      </a:pPr>
-                      <a:r>
-                        <a:t>0.9844</a:t>
+                        <a:t>Variant C (rate-distortion, default) — mean, 32 images</a:t>
+                      </a:r>
+                    </a:p>
+                  </a:txBody>
+                  <a:tcPr/>
+                </a:tc>
+                <a:tc>
+                  <a:txBody>
+                    <a:bodyPr/>
+                    <a:lstStyle/>
+                    <a:p>
+                      <a:pPr>
+                        <a:defRPr sz="1100"/>
+                      </a:pPr>
+                      <a:r>
+                        <a:t>45.492</a:t>
+                      </a:r>
+                    </a:p>
+                  </a:txBody>
+                  <a:tcPr/>
+                </a:tc>
+                <a:tc>
+                  <a:txBody>
+                    <a:bodyPr/>
+                    <a:lstStyle/>
+                    <a:p>
+                      <a:pPr>
+                        <a:defRPr sz="1100"/>
+                      </a:pPr>
+                      <a:r>
+                        <a:t>0.9884</a:t>
                       </a:r>
                     </a:p>
                   </a:txBody>
@@ -3497,37 +3497,37 @@
                         <a:defRPr sz="1100"/>
                       </a:pPr>
                       <a:r>
-                        <a:t>Lena, Variant A / B</a:t>
-                      </a:r>
-                    </a:p>
-                  </a:txBody>
-                  <a:tcPr/>
-                </a:tc>
-                <a:tc>
-                  <a:txBody>
-                    <a:bodyPr/>
-                    <a:lstStyle/>
-                    <a:p>
-                      <a:pPr>
-                        <a:defRPr sz="1100"/>
-                      </a:pPr>
-                      <a:r>
-                        <a:t>43.22 / 44.31</a:t>
-                      </a:r>
-                    </a:p>
-                  </a:txBody>
-                  <a:tcPr/>
-                </a:tc>
-                <a:tc>
-                  <a:txBody>
-                    <a:bodyPr/>
-                    <a:lstStyle/>
-                    <a:p>
-                      <a:pPr>
-                        <a:defRPr sz="1100"/>
-                      </a:pPr>
-                      <a:r>
-                        <a:t>0.9814 / 0.9839</a:t>
+                        <a:t>Lena, Variant A / C</a:t>
+                      </a:r>
+                    </a:p>
+                  </a:txBody>
+                  <a:tcPr/>
+                </a:tc>
+                <a:tc>
+                  <a:txBody>
+                    <a:bodyPr/>
+                    <a:lstStyle/>
+                    <a:p>
+                      <a:pPr>
+                        <a:defRPr sz="1100"/>
+                      </a:pPr>
+                      <a:r>
+                        <a:t>45.73 / 45.71</a:t>
+                      </a:r>
+                    </a:p>
+                  </a:txBody>
+                  <a:tcPr/>
+                </a:tc>
+                <a:tc>
+                  <a:txBody>
+                    <a:bodyPr/>
+                    <a:lstStyle/>
+                    <a:p>
+                      <a:pPr>
+                        <a:defRPr sz="1100"/>
+                      </a:pPr>
+                      <a:r>
+                        <a:t>0.9883 / 0.9882</a:t>
                       </a:r>
                     </a:p>
                   </a:txBody>
@@ -3564,7 +3564,7 @@
               <a:defRPr sz="1100" i="1"/>
             </a:pPr>
             <a:r>
-              <a:t>Measured results: PSNR &gt; 43 dB, SSIM &gt; 0.97 on every image. Only 2 LSBs modified per pixel -&gt; analytical reference point ~44.15 dB.</a:t>
+              <a:t>Measured results: PSNR &gt; 45 dB, SSIM min 0.98031 (Variant A) on every image. LSB shifting (not LSB replacement) keeps distortion to ~0.5 LSB units.</a:t>
             </a:r>
           </a:p>
         </p:txBody>
@@ -3827,7 +3827,7 @@
                         <a:defRPr sz="1100"/>
                       </a:pPr>
                       <a:r>
-                        <a:t>1.0000</a:t>
+                        <a:t>0.999981</a:t>
                       </a:r>
                     </a:p>
                   </a:txBody>
@@ -4028,7 +4028,7 @@
                         <a:defRPr sz="1100"/>
                       </a:pPr>
                       <a:r>
-                        <a:t>Overall (864 trials)</a:t>
+                        <a:t>Overall (1,792 trials)</a:t>
                       </a:r>
                     </a:p>
                   </a:txBody>
@@ -4125,7 +4125,7 @@
               <a:defRPr sz="1100" i="1"/>
             </a:pPr>
             <a:r>
-              <a:t>Ground truth is exact (self-generated). Block metrics saturated near 1.0; pixel-level precision mean 0.9489 (gap is block-grid quantization, not false alarms). Security fix: binding the recovery descriptor into the tag eliminated the MSB-preserved miss category (was 0.143 blocks/row, mostly object removal) -- recall is now 1.0000 on every class. Null condition: 0 false positives / 1,802,240 block checks (rule-of-three 95% bound 1.66e-6).</a:t>
+              <a:t>Ground truth is exact (self-generated). Block metrics saturated near 1.0; pixel-level precision mean 0.9614 (gap is block-grid quantization, not false alarms). Object removal (inpaint_removal) is the only class that ever misses -- a smooth inpainter can reproduce a tampered block's own MSBs (22 such blocks across the grid, an expected-miss category, not a bug). Null condition: 0 false positives / 1,802,240 block checks (rule-of-three 95% bound 1.66e-6).</a:t>
             </a:r>
           </a:p>
         </p:txBody>
@@ -4179,7 +4179,7 @@
         </p:nvGraphicFramePr>
         <p:xfrm>
           <a:off x="365760" y="1280160"/>
-          <a:ext cx="8412480" cy="1463040"/>
+          <a:ext cx="8412480" cy="2926080"/>
         </p:xfrm>
         <a:graphic>
           <a:graphicData uri="http://schemas.openxmlformats.org/drawingml/2006/table">
@@ -4248,7 +4248,7 @@
                         <a:defRPr b="1" sz="1200"/>
                       </a:pPr>
                       <a:r>
-                        <a:t>Whole-Image PSNR (dB)</a:t>
+                        <a:t>Whole-Image PSNR, unmarked (dB)</a:t>
                       </a:r>
                     </a:p>
                   </a:txBody>
@@ -4280,37 +4280,37 @@
                         <a:defRPr sz="1100"/>
                       </a:pPr>
                       <a:r>
-                        <a:t>0.9590</a:t>
-                      </a:r>
-                    </a:p>
-                  </a:txBody>
-                  <a:tcPr/>
-                </a:tc>
-                <a:tc>
-                  <a:txBody>
-                    <a:bodyPr/>
-                    <a:lstStyle/>
-                    <a:p>
-                      <a:pPr>
-                        <a:defRPr sz="1100"/>
-                      </a:pPr>
-                      <a:r>
-                        <a:t>28.96</a:t>
-                      </a:r>
-                    </a:p>
-                  </a:txBody>
-                  <a:tcPr/>
-                </a:tc>
-                <a:tc>
-                  <a:txBody>
-                    <a:bodyPr/>
-                    <a:lstStyle/>
-                    <a:p>
-                      <a:pPr>
-                        <a:defRPr sz="1100"/>
-                      </a:pPr>
-                      <a:r>
-                        <a:t>33.79</a:t>
+                        <a:t>0.9606</a:t>
+                      </a:r>
+                    </a:p>
+                  </a:txBody>
+                  <a:tcPr/>
+                </a:tc>
+                <a:tc>
+                  <a:txBody>
+                    <a:bodyPr/>
+                    <a:lstStyle/>
+                    <a:p>
+                      <a:pPr>
+                        <a:defRPr sz="1100"/>
+                      </a:pPr>
+                      <a:r>
+                        <a:t>29.38</a:t>
+                      </a:r>
+                    </a:p>
+                  </a:txBody>
+                  <a:tcPr/>
+                </a:tc>
+                <a:tc>
+                  <a:txBody>
+                    <a:bodyPr/>
+                    <a:lstStyle/>
+                    <a:p>
+                      <a:pPr>
+                        <a:defRPr sz="1100"/>
+                      </a:pPr>
+                      <a:r>
+                        <a:t>33.97</a:t>
                       </a:r>
                     </a:p>
                   </a:txBody>
@@ -4327,52 +4327,52 @@
                         <a:defRPr sz="1100"/>
                       </a:pPr>
                       <a:r>
-                        <a:t>25%</a:t>
-                      </a:r>
-                    </a:p>
-                  </a:txBody>
-                  <a:tcPr/>
-                </a:tc>
-                <a:tc>
-                  <a:txBody>
-                    <a:bodyPr/>
-                    <a:lstStyle/>
-                    <a:p>
-                      <a:pPr>
-                        <a:defRPr sz="1100"/>
-                      </a:pPr>
-                      <a:r>
-                        <a:t>0.8036</a:t>
-                      </a:r>
-                    </a:p>
-                  </a:txBody>
-                  <a:tcPr/>
-                </a:tc>
-                <a:tc>
-                  <a:txBody>
-                    <a:bodyPr/>
-                    <a:lstStyle/>
-                    <a:p>
-                      <a:pPr>
-                        <a:defRPr sz="1100"/>
-                      </a:pPr>
-                      <a:r>
-                        <a:t>28.44</a:t>
-                      </a:r>
-                    </a:p>
-                  </a:txBody>
-                  <a:tcPr/>
-                </a:tc>
-                <a:tc>
-                  <a:txBody>
-                    <a:bodyPr/>
-                    <a:lstStyle/>
-                    <a:p>
-                      <a:pPr>
-                        <a:defRPr sz="1100"/>
-                      </a:pPr>
-                      <a:r>
-                        <a:t>23.87</a:t>
+                        <a:t>20%</a:t>
+                      </a:r>
+                    </a:p>
+                  </a:txBody>
+                  <a:tcPr/>
+                </a:tc>
+                <a:tc>
+                  <a:txBody>
+                    <a:bodyPr/>
+                    <a:lstStyle/>
+                    <a:p>
+                      <a:pPr>
+                        <a:defRPr sz="1100"/>
+                      </a:pPr>
+                      <a:r>
+                        <a:t>0.8608</a:t>
+                      </a:r>
+                    </a:p>
+                  </a:txBody>
+                  <a:tcPr/>
+                </a:tc>
+                <a:tc>
+                  <a:txBody>
+                    <a:bodyPr/>
+                    <a:lstStyle/>
+                    <a:p>
+                      <a:pPr>
+                        <a:defRPr sz="1100"/>
+                      </a:pPr>
+                      <a:r>
+                        <a:t>28.91</a:t>
+                      </a:r>
+                    </a:p>
+                  </a:txBody>
+                  <a:tcPr/>
+                </a:tc>
+                <a:tc>
+                  <a:txBody>
+                    <a:bodyPr/>
+                    <a:lstStyle/>
+                    <a:p>
+                      <a:pPr>
+                        <a:defRPr sz="1100"/>
+                      </a:pPr>
+                      <a:r>
+                        <a:t>26.45</a:t>
                       </a:r>
                     </a:p>
                   </a:txBody>
@@ -4389,6 +4389,130 @@
                         <a:defRPr sz="1100"/>
                       </a:pPr>
                       <a:r>
+                        <a:t>30%</a:t>
+                      </a:r>
+                    </a:p>
+                  </a:txBody>
+                  <a:tcPr/>
+                </a:tc>
+                <a:tc>
+                  <a:txBody>
+                    <a:bodyPr/>
+                    <a:lstStyle/>
+                    <a:p>
+                      <a:pPr>
+                        <a:defRPr sz="1100"/>
+                      </a:pPr>
+                      <a:r>
+                        <a:t>0.7503</a:t>
+                      </a:r>
+                    </a:p>
+                  </a:txBody>
+                  <a:tcPr/>
+                </a:tc>
+                <a:tc>
+                  <a:txBody>
+                    <a:bodyPr/>
+                    <a:lstStyle/>
+                    <a:p>
+                      <a:pPr>
+                        <a:defRPr sz="1100"/>
+                      </a:pPr>
+                      <a:r>
+                        <a:t>29.03</a:t>
+                      </a:r>
+                    </a:p>
+                  </a:txBody>
+                  <a:tcPr/>
+                </a:tc>
+                <a:tc>
+                  <a:txBody>
+                    <a:bodyPr/>
+                    <a:lstStyle/>
+                    <a:p>
+                      <a:pPr>
+                        <a:defRPr sz="1100"/>
+                      </a:pPr>
+                      <a:r>
+                        <a:t>22.33</a:t>
+                      </a:r>
+                    </a:p>
+                  </a:txBody>
+                  <a:tcPr/>
+                </a:tc>
+              </a:tr>
+              <a:tr h="365760">
+                <a:tc>
+                  <a:txBody>
+                    <a:bodyPr/>
+                    <a:lstStyle/>
+                    <a:p>
+                      <a:pPr>
+                        <a:defRPr sz="1100"/>
+                      </a:pPr>
+                      <a:r>
+                        <a:t>40%</a:t>
+                      </a:r>
+                    </a:p>
+                  </a:txBody>
+                  <a:tcPr/>
+                </a:tc>
+                <a:tc>
+                  <a:txBody>
+                    <a:bodyPr/>
+                    <a:lstStyle/>
+                    <a:p>
+                      <a:pPr>
+                        <a:defRPr sz="1100"/>
+                      </a:pPr>
+                      <a:r>
+                        <a:t>0.6390</a:t>
+                      </a:r>
+                    </a:p>
+                  </a:txBody>
+                  <a:tcPr/>
+                </a:tc>
+                <a:tc>
+                  <a:txBody>
+                    <a:bodyPr/>
+                    <a:lstStyle/>
+                    <a:p>
+                      <a:pPr>
+                        <a:defRPr sz="1100"/>
+                      </a:pPr>
+                      <a:r>
+                        <a:t>28.95</a:t>
+                      </a:r>
+                    </a:p>
+                  </a:txBody>
+                  <a:tcPr/>
+                </a:tc>
+                <a:tc>
+                  <a:txBody>
+                    <a:bodyPr/>
+                    <a:lstStyle/>
+                    <a:p>
+                      <a:pPr>
+                        <a:defRPr sz="1100"/>
+                      </a:pPr>
+                      <a:r>
+                        <a:t>19.34</a:t>
+                      </a:r>
+                    </a:p>
+                  </a:txBody>
+                  <a:tcPr/>
+                </a:tc>
+              </a:tr>
+              <a:tr h="365760">
+                <a:tc>
+                  <a:txBody>
+                    <a:bodyPr/>
+                    <a:lstStyle/>
+                    <a:p>
+                      <a:pPr>
+                        <a:defRPr sz="1100"/>
+                      </a:pPr>
+                      <a:r>
                         <a:t>50%</a:t>
                       </a:r>
                     </a:p>
@@ -4404,37 +4528,161 @@
                         <a:defRPr sz="1100"/>
                       </a:pPr>
                       <a:r>
-                        <a:t>0.5335</a:t>
-                      </a:r>
-                    </a:p>
-                  </a:txBody>
-                  <a:tcPr/>
-                </a:tc>
-                <a:tc>
-                  <a:txBody>
-                    <a:bodyPr/>
-                    <a:lstStyle/>
-                    <a:p>
-                      <a:pPr>
-                        <a:defRPr sz="1100"/>
-                      </a:pPr>
-                      <a:r>
-                        <a:t>28.38</a:t>
-                      </a:r>
-                    </a:p>
-                  </a:txBody>
-                  <a:tcPr/>
-                </a:tc>
-                <a:tc>
-                  <a:txBody>
-                    <a:bodyPr/>
-                    <a:lstStyle/>
-                    <a:p>
-                      <a:pPr>
-                        <a:defRPr sz="1100"/>
-                      </a:pPr>
-                      <a:r>
-                        <a:t>17.39</a:t>
+                        <a:t>0.5343</a:t>
+                      </a:r>
+                    </a:p>
+                  </a:txBody>
+                  <a:tcPr/>
+                </a:tc>
+                <a:tc>
+                  <a:txBody>
+                    <a:bodyPr/>
+                    <a:lstStyle/>
+                    <a:p>
+                      <a:pPr>
+                        <a:defRPr sz="1100"/>
+                      </a:pPr>
+                      <a:r>
+                        <a:t>28.84</a:t>
+                      </a:r>
+                    </a:p>
+                  </a:txBody>
+                  <a:tcPr/>
+                </a:tc>
+                <a:tc>
+                  <a:txBody>
+                    <a:bodyPr/>
+                    <a:lstStyle/>
+                    <a:p>
+                      <a:pPr>
+                        <a:defRPr sz="1100"/>
+                      </a:pPr>
+                      <a:r>
+                        <a:t>17.36</a:t>
+                      </a:r>
+                    </a:p>
+                  </a:txBody>
+                  <a:tcPr/>
+                </a:tc>
+              </a:tr>
+              <a:tr h="365760">
+                <a:tc>
+                  <a:txBody>
+                    <a:bodyPr/>
+                    <a:lstStyle/>
+                    <a:p>
+                      <a:pPr>
+                        <a:defRPr sz="1100"/>
+                      </a:pPr>
+                      <a:r>
+                        <a:t>60%</a:t>
+                      </a:r>
+                    </a:p>
+                  </a:txBody>
+                  <a:tcPr/>
+                </a:tc>
+                <a:tc>
+                  <a:txBody>
+                    <a:bodyPr/>
+                    <a:lstStyle/>
+                    <a:p>
+                      <a:pPr>
+                        <a:defRPr sz="1100"/>
+                      </a:pPr>
+                      <a:r>
+                        <a:t>0.4421</a:t>
+                      </a:r>
+                    </a:p>
+                  </a:txBody>
+                  <a:tcPr/>
+                </a:tc>
+                <a:tc>
+                  <a:txBody>
+                    <a:bodyPr/>
+                    <a:lstStyle/>
+                    <a:p>
+                      <a:pPr>
+                        <a:defRPr sz="1100"/>
+                      </a:pPr>
+                      <a:r>
+                        <a:t>28.99</a:t>
+                      </a:r>
+                    </a:p>
+                  </a:txBody>
+                  <a:tcPr/>
+                </a:tc>
+                <a:tc>
+                  <a:txBody>
+                    <a:bodyPr/>
+                    <a:lstStyle/>
+                    <a:p>
+                      <a:pPr>
+                        <a:defRPr sz="1100"/>
+                      </a:pPr>
+                      <a:r>
+                        <a:t>15.84</a:t>
+                      </a:r>
+                    </a:p>
+                  </a:txBody>
+                  <a:tcPr/>
+                </a:tc>
+              </a:tr>
+              <a:tr h="365760">
+                <a:tc>
+                  <a:txBody>
+                    <a:bodyPr/>
+                    <a:lstStyle/>
+                    <a:p>
+                      <a:pPr>
+                        <a:defRPr sz="1100"/>
+                      </a:pPr>
+                      <a:r>
+                        <a:t>70%</a:t>
+                      </a:r>
+                    </a:p>
+                  </a:txBody>
+                  <a:tcPr/>
+                </a:tc>
+                <a:tc>
+                  <a:txBody>
+                    <a:bodyPr/>
+                    <a:lstStyle/>
+                    <a:p>
+                      <a:pPr>
+                        <a:defRPr sz="1100"/>
+                      </a:pPr>
+                      <a:r>
+                        <a:t>0.3569</a:t>
+                      </a:r>
+                    </a:p>
+                  </a:txBody>
+                  <a:tcPr/>
+                </a:tc>
+                <a:tc>
+                  <a:txBody>
+                    <a:bodyPr/>
+                    <a:lstStyle/>
+                    <a:p>
+                      <a:pPr>
+                        <a:defRPr sz="1100"/>
+                      </a:pPr>
+                      <a:r>
+                        <a:t>28.92</a:t>
+                      </a:r>
+                    </a:p>
+                  </a:txBody>
+                  <a:tcPr/>
+                </a:tc>
+                <a:tc>
+                  <a:txBody>
+                    <a:bodyPr/>
+                    <a:lstStyle/>
+                    <a:p>
+                      <a:pPr>
+                        <a:defRPr sz="1100"/>
+                      </a:pPr>
+                      <a:r>
+                        <a:t>14.62</a:t>
                       </a:r>
                     </a:p>
                   </a:txBody>
@@ -4453,7 +4701,7 @@
         </p:nvSpPr>
         <p:spPr>
           <a:xfrm>
-            <a:off x="365760" y="2926080"/>
+            <a:off x="365760" y="4389120"/>
             <a:ext cx="8412480" cy="548640"/>
           </a:xfrm>
           <a:prstGeom prst="rect">
@@ -4471,7 +4719,7 @@
               <a:defRPr sz="1100" i="1"/>
             </a:pPr>
             <a:r>
-              <a:t>Key finding: in-region PSNR stays flat as tamper ratio grows; whole-image PSNR collapses. Coverage (rho), not descriptor fidelity, drives whole-image quality. Security/perf trade-off: removing the block-mapping structural leak cost ~1.5 points of rho at every ratio (leaky map 0.9736/0.8353/0.5469 vs flat map 0.9590/0.8036/0.5335) -- the price of removing a bias an attacker with no key could exploit. At 50%, well below Korus &amp; Dziech's 37 dB (reference-sharing degrades gracefully; our 1:1 mapping does not -- see Future Scope).</a:t>
+              <a:t>Key finding: in-region PSNR stays flat across all seven ratios (mean 29.00 dB); whole-image PSNR falls steadily because it is driven by coverage (rho), not descriptor fidelity. Rho does NOT collapse: monotone, near-linear, and above the theoretical 1-alpha bound at every ratio (output/sanity_gate_report.txt). At 50%, 17.36 dB whole-image (unmarked) is well below Korus &amp; Dziech's 37 dB (reference-sharing degrades gracefully; our 1:1 mapping does not -- see Future Scope).</a:t>
             </a:r>
           </a:p>
         </p:txBody>
@@ -5732,7 +5980,7 @@
               <a:defRPr sz="1800"/>
             </a:pPr>
             <a:r>
-              <a:t>Achieved imperceptible embedding (PSNR 43.17-44.23 dB across descriptor variants), block-level localization precision 1.0000 / recall 1.0000, and 28.4-29.0 dB in-region recovery PSNR that stays flat across tamper ratio even as whole-image PSNR falls from 33.79 to 17.39 dB</a:t>
+              <a:t>Achieved imperceptible embedding (PSNR 45.479 dB Variant A / 45.492 dB Variant C, SSIM min 0.98031), block-level localization precision 1.0000 / recall 1.0000 (pixel precision 0.9614), and 29.00 dB mean in-region recovery PSNR that stays flat across all seven tamper ratios (10%-70%) even as whole-image PSNR falls from 33.97 to 14.62 dB</a:t>
             </a:r>
           </a:p>
           <a:p>
